--- a/html/COMP-_L4.2_PreLec.pptx
+++ b/html/COMP-_L4.2_PreLec.pptx
@@ -5,7 +5,7 @@
     <p:sldMasterId id="2147483648" r:id="rId1"/>
   </p:sldMasterIdLst>
   <p:notesMasterIdLst>
-    <p:notesMasterId r:id="rId24"/>
+    <p:notesMasterId r:id="rId25"/>
   </p:notesMasterIdLst>
   <p:sldIdLst>
     <p:sldId id="256" r:id="rId2"/>
@@ -23,13 +23,14 @@
     <p:sldId id="343" r:id="rId14"/>
     <p:sldId id="345" r:id="rId15"/>
     <p:sldId id="346" r:id="rId16"/>
-    <p:sldId id="305" r:id="rId17"/>
-    <p:sldId id="306" r:id="rId18"/>
-    <p:sldId id="350" r:id="rId19"/>
-    <p:sldId id="271" r:id="rId20"/>
-    <p:sldId id="348" r:id="rId21"/>
-    <p:sldId id="351" r:id="rId22"/>
-    <p:sldId id="352" r:id="rId23"/>
+    <p:sldId id="347" r:id="rId17"/>
+    <p:sldId id="305" r:id="rId18"/>
+    <p:sldId id="306" r:id="rId19"/>
+    <p:sldId id="350" r:id="rId20"/>
+    <p:sldId id="271" r:id="rId21"/>
+    <p:sldId id="348" r:id="rId22"/>
+    <p:sldId id="351" r:id="rId23"/>
+    <p:sldId id="352" r:id="rId24"/>
   </p:sldIdLst>
   <p:sldSz cx="9144000" cy="6858000" type="screen4x3"/>
   <p:notesSz cx="6858000" cy="9144000"/>
@@ -229,7 +230,7 @@
           <a:p>
             <a:fld id="{5B3C0760-A542-FE4F-8EBF-B1B1FB6407CD}" type="datetimeFigureOut">
               <a:rPr lang="en-001" smtClean="0"/>
-              <a:t>07/10/2026</a:t>
+              <a:t>13/10/2026</a:t>
             </a:fld>
             <a:endParaRPr lang="en-001"/>
           </a:p>
@@ -972,7 +973,7 @@
           <a:p>
             <a:fld id="{5BCAD085-E8A6-8845-BD4E-CB4CCA059FC4}" type="datetimeFigureOut">
               <a:rPr lang="en-US" smtClean="0"/>
-              <a:t>10/7/26</a:t>
+              <a:t>10/13/26</a:t>
             </a:fld>
             <a:endParaRPr lang="en-US"/>
           </a:p>
@@ -1140,7 +1141,7 @@
           <a:p>
             <a:fld id="{5BCAD085-E8A6-8845-BD4E-CB4CCA059FC4}" type="datetimeFigureOut">
               <a:rPr lang="en-US" smtClean="0"/>
-              <a:t>10/7/26</a:t>
+              <a:t>10/13/26</a:t>
             </a:fld>
             <a:endParaRPr lang="en-US"/>
           </a:p>
@@ -1318,7 +1319,7 @@
           <a:p>
             <a:fld id="{5BCAD085-E8A6-8845-BD4E-CB4CCA059FC4}" type="datetimeFigureOut">
               <a:rPr lang="en-US" smtClean="0"/>
-              <a:t>10/7/26</a:t>
+              <a:t>10/13/26</a:t>
             </a:fld>
             <a:endParaRPr lang="en-US"/>
           </a:p>
@@ -1448,7 +1449,7 @@
           <a:p>
             <a:fld id="{1663657D-8E22-4681-BD7E-16E8F6F56673}" type="datetimeFigureOut">
               <a:rPr lang="en-FI" smtClean="0"/>
-              <a:t>10/7/26</a:t>
+              <a:t>10/13/26</a:t>
             </a:fld>
             <a:endParaRPr lang="en-FI"/>
           </a:p>
@@ -1691,7 +1692,7 @@
           <a:p>
             <a:fld id="{5BCAD085-E8A6-8845-BD4E-CB4CCA059FC4}" type="datetimeFigureOut">
               <a:rPr lang="en-US" smtClean="0"/>
-              <a:t>10/7/26</a:t>
+              <a:t>10/13/26</a:t>
             </a:fld>
             <a:endParaRPr lang="en-US"/>
           </a:p>
@@ -1936,7 +1937,7 @@
           <a:p>
             <a:fld id="{5BCAD085-E8A6-8845-BD4E-CB4CCA059FC4}" type="datetimeFigureOut">
               <a:rPr lang="en-US" smtClean="0"/>
-              <a:t>10/7/26</a:t>
+              <a:t>10/13/26</a:t>
             </a:fld>
             <a:endParaRPr lang="en-US"/>
           </a:p>
@@ -2221,7 +2222,7 @@
           <a:p>
             <a:fld id="{5BCAD085-E8A6-8845-BD4E-CB4CCA059FC4}" type="datetimeFigureOut">
               <a:rPr lang="en-US" smtClean="0"/>
-              <a:t>10/7/26</a:t>
+              <a:t>10/13/26</a:t>
             </a:fld>
             <a:endParaRPr lang="en-US"/>
           </a:p>
@@ -2640,7 +2641,7 @@
           <a:p>
             <a:fld id="{5BCAD085-E8A6-8845-BD4E-CB4CCA059FC4}" type="datetimeFigureOut">
               <a:rPr lang="en-US" smtClean="0"/>
-              <a:t>10/7/26</a:t>
+              <a:t>10/13/26</a:t>
             </a:fld>
             <a:endParaRPr lang="en-US"/>
           </a:p>
@@ -2757,7 +2758,7 @@
           <a:p>
             <a:fld id="{5BCAD085-E8A6-8845-BD4E-CB4CCA059FC4}" type="datetimeFigureOut">
               <a:rPr lang="en-US" smtClean="0"/>
-              <a:t>10/7/26</a:t>
+              <a:t>10/13/26</a:t>
             </a:fld>
             <a:endParaRPr lang="en-US"/>
           </a:p>
@@ -2852,7 +2853,7 @@
           <a:p>
             <a:fld id="{5BCAD085-E8A6-8845-BD4E-CB4CCA059FC4}" type="datetimeFigureOut">
               <a:rPr lang="en-US" smtClean="0"/>
-              <a:t>10/7/26</a:t>
+              <a:t>10/13/26</a:t>
             </a:fld>
             <a:endParaRPr lang="en-US"/>
           </a:p>
@@ -3127,7 +3128,7 @@
           <a:p>
             <a:fld id="{5BCAD085-E8A6-8845-BD4E-CB4CCA059FC4}" type="datetimeFigureOut">
               <a:rPr lang="en-US" smtClean="0"/>
-              <a:t>10/7/26</a:t>
+              <a:t>10/13/26</a:t>
             </a:fld>
             <a:endParaRPr lang="en-US"/>
           </a:p>
@@ -3379,7 +3380,7 @@
           <a:p>
             <a:fld id="{5BCAD085-E8A6-8845-BD4E-CB4CCA059FC4}" type="datetimeFigureOut">
               <a:rPr lang="en-US" smtClean="0"/>
-              <a:t>10/7/26</a:t>
+              <a:t>10/13/26</a:t>
             </a:fld>
             <a:endParaRPr lang="en-US"/>
           </a:p>
@@ -3590,7 +3591,7 @@
           <a:p>
             <a:fld id="{5BCAD085-E8A6-8845-BD4E-CB4CCA059FC4}" type="datetimeFigureOut">
               <a:rPr lang="en-US" smtClean="0"/>
-              <a:t>10/7/26</a:t>
+              <a:t>10/13/26</a:t>
             </a:fld>
             <a:endParaRPr lang="en-US"/>
           </a:p>
@@ -3671,6 +3672,146 @@
               <a:t>‹#›</a:t>
             </a:fld>
             <a:endParaRPr lang="en-US"/>
+          </a:p>
+        </p:txBody>
+      </p:sp>
+      <p:pic>
+        <p:nvPicPr>
+          <p:cNvPr id="7" name="Logo" descr="University of Southampton logo">
+            <a:extLst>
+              <a:ext uri="{FF2B5EF4-FFF2-40B4-BE49-F238E27FC236}">
+                <a16:creationId xmlns:a16="http://schemas.microsoft.com/office/drawing/2014/main" id="{60EBC0D3-D2FE-A6C7-BF78-AADE6EC5E47F}"/>
+              </a:ext>
+            </a:extLst>
+          </p:cNvPr>
+          <p:cNvPicPr>
+            <a:picLocks noChangeAspect="1"/>
+          </p:cNvPicPr>
+          <p:nvPr userDrawn="1"/>
+        </p:nvPicPr>
+        <p:blipFill>
+          <a:blip r:embed="rId14"/>
+          <a:stretch>
+            <a:fillRect/>
+          </a:stretch>
+        </p:blipFill>
+        <p:spPr>
+          <a:xfrm>
+            <a:off x="7406640" y="6384033"/>
+            <a:ext cx="1371600" cy="291086"/>
+          </a:xfrm>
+          <a:prstGeom prst="rect">
+            <a:avLst/>
+          </a:prstGeom>
+        </p:spPr>
+      </p:pic>
+      <p:sp>
+        <p:nvSpPr>
+          <p:cNvPr id="8" name="Footer slide number">
+            <a:extLst>
+              <a:ext uri="{FF2B5EF4-FFF2-40B4-BE49-F238E27FC236}">
+                <a16:creationId xmlns:a16="http://schemas.microsoft.com/office/drawing/2014/main" id="{06678808-4BB4-8FC4-413E-0478C5D19BFE}"/>
+              </a:ext>
+            </a:extLst>
+          </p:cNvPr>
+          <p:cNvSpPr txBox="1"/>
+          <p:nvPr userDrawn="1"/>
+        </p:nvSpPr>
+        <p:spPr>
+          <a:xfrm>
+            <a:off x="365760" y="6384033"/>
+            <a:ext cx="457200" cy="291086"/>
+          </a:xfrm>
+          <a:prstGeom prst="rect">
+            <a:avLst/>
+          </a:prstGeom>
+          <a:noFill/>
+        </p:spPr>
+        <p:txBody>
+          <a:bodyPr wrap="square" lIns="0" tIns="0" rIns="0" bIns="0" anchor="ctr">
+            <a:noAutofit/>
+          </a:bodyPr>
+          <a:lstStyle/>
+          <a:p>
+            <a:fld id="{B6F15528-21DE-4FAA-801E-634DDDAF4B2B}" type="slidenum">
+              <a:rPr lang="en-GB" sz="1400" dirty="0">
+                <a:solidFill>
+                  <a:srgbClr val="1F497D"/>
+                </a:solidFill>
+              </a:rPr>
+              <a:t>‹#›</a:t>
+            </a:fld>
+            <a:endParaRPr lang="en-GB" sz="1400" dirty="0">
+              <a:solidFill>
+                <a:srgbClr val="1F497D"/>
+              </a:solidFill>
+            </a:endParaRPr>
+          </a:p>
+        </p:txBody>
+      </p:sp>
+      <p:sp>
+        <p:nvSpPr>
+          <p:cNvPr id="9" name="Footer SEAtS">
+            <a:extLst>
+              <a:ext uri="{FF2B5EF4-FFF2-40B4-BE49-F238E27FC236}">
+                <a16:creationId xmlns:a16="http://schemas.microsoft.com/office/drawing/2014/main" id="{08F4D601-2AE5-44DB-96FE-44BAA11B0BC8}"/>
+              </a:ext>
+            </a:extLst>
+          </p:cNvPr>
+          <p:cNvSpPr txBox="1"/>
+          <p:nvPr userDrawn="1"/>
+        </p:nvSpPr>
+        <p:spPr>
+          <a:xfrm>
+            <a:off x="742950" y="6430390"/>
+            <a:ext cx="3200400" cy="291086"/>
+          </a:xfrm>
+          <a:prstGeom prst="rect">
+            <a:avLst/>
+          </a:prstGeom>
+          <a:noFill/>
+        </p:spPr>
+        <p:txBody>
+          <a:bodyPr wrap="square" lIns="0" tIns="0" rIns="0" bIns="0" anchor="ctr">
+            <a:noAutofit/>
+          </a:bodyPr>
+          <a:lstStyle/>
+          <a:p>
+            <a:pPr marL="0" marR="0" indent="0" algn="l" defTabSz="457200" rtl="0" eaLnBrk="1" fontAlgn="auto" latinLnBrk="0" hangingPunct="1">
+              <a:lnSpc>
+                <a:spcPct val="100000"/>
+              </a:lnSpc>
+              <a:spcBef>
+                <a:spcPts val="0"/>
+              </a:spcBef>
+              <a:spcAft>
+                <a:spcPts val="0"/>
+              </a:spcAft>
+              <a:buClrTx/>
+              <a:buSzTx/>
+              <a:buFontTx/>
+              <a:buNone/>
+              <a:tabLst/>
+              <a:defRPr/>
+            </a:pPr>
+            <a:r>
+              <a:rPr lang="en-GB" sz="1000" b="1" dirty="0">
+                <a:solidFill>
+                  <a:srgbClr val="1F497D"/>
+                </a:solidFill>
+              </a:rPr>
+              <a:t>SEAtS | 612352</a:t>
+            </a:r>
+          </a:p>
+          <a:p>
+            <a:r>
+              <a:rPr lang="en-GB" sz="800" b="1" dirty="0">
+                <a:solidFill>
+                  <a:srgbClr val="8C8C8C"/>
+                </a:solidFill>
+              </a:rPr>
+              <a:t>© University of Southampton</a:t>
+            </a:r>
           </a:p>
         </p:txBody>
       </p:sp>
@@ -6121,7 +6262,13 @@
   <p:cSld>
     <p:spTree>
       <p:nvGrpSpPr>
-        <p:cNvPr id="1" name=""/>
+        <p:cNvPr id="1" name="">
+          <a:extLst>
+            <a:ext uri="{FF2B5EF4-FFF2-40B4-BE49-F238E27FC236}">
+              <a16:creationId xmlns:a16="http://schemas.microsoft.com/office/drawing/2014/main" id="{1A5BC36A-7FD1-D792-E565-990AD5B66ED2}"/>
+            </a:ext>
+          </a:extLst>
+        </p:cNvPr>
         <p:cNvGrpSpPr/>
         <p:nvPr/>
       </p:nvGrpSpPr>
@@ -6138,7 +6285,7 @@
           <p:cNvPr id="2" name="Title 1">
             <a:extLst>
               <a:ext uri="{FF2B5EF4-FFF2-40B4-BE49-F238E27FC236}">
-                <a16:creationId xmlns:a16="http://schemas.microsoft.com/office/drawing/2014/main" id="{31CD6A4D-CA98-06F7-5ABB-0B760BE843CE}"/>
+                <a16:creationId xmlns:a16="http://schemas.microsoft.com/office/drawing/2014/main" id="{7BF9D305-5F60-4F46-C731-484CF5F4C01A}"/>
               </a:ext>
             </a:extLst>
           </p:cNvPr>
@@ -6151,14 +6298,12 @@
         </p:nvSpPr>
         <p:spPr>
           <a:xfrm>
-            <a:off x="285750" y="0"/>
-            <a:ext cx="8572500" cy="1143000"/>
+            <a:off x="241024" y="0"/>
+            <a:ext cx="8763828" cy="1143000"/>
           </a:xfrm>
         </p:spPr>
         <p:txBody>
-          <a:bodyPr>
-            <a:normAutofit/>
-          </a:bodyPr>
+          <a:bodyPr/>
           <a:lstStyle/>
           <a:p>
             <a:r>
@@ -6167,7 +6312,7 @@
                   <a:schemeClr val="tx2"/>
                 </a:solidFill>
               </a:rPr>
-              <a:t>Event-B Notation Basics</a:t>
+              <a:t>Safety Requirement Identification</a:t>
             </a:r>
             <a:endParaRPr lang="en-001" b="1" dirty="0">
               <a:solidFill>
@@ -6179,365 +6324,144 @@
       </p:sp>
       <p:sp>
         <p:nvSpPr>
-          <p:cNvPr id="6" name="TextBox 5">
+          <p:cNvPr id="3" name="Content Placeholder 2">
             <a:extLst>
               <a:ext uri="{FF2B5EF4-FFF2-40B4-BE49-F238E27FC236}">
-                <a16:creationId xmlns:a16="http://schemas.microsoft.com/office/drawing/2014/main" id="{F9F2929C-77CE-A57A-5F28-41D2A207ACDD}"/>
+                <a16:creationId xmlns:a16="http://schemas.microsoft.com/office/drawing/2014/main" id="{CF99F0F8-D8C6-8CE4-7595-4720ADE5BF5F}"/>
               </a:ext>
             </a:extLst>
           </p:cNvPr>
-          <p:cNvSpPr txBox="1"/>
-          <p:nvPr/>
+          <p:cNvSpPr>
+            <a:spLocks noGrp="1"/>
+          </p:cNvSpPr>
+          <p:nvPr>
+            <p:ph idx="1"/>
+          </p:nvPr>
         </p:nvSpPr>
         <p:spPr>
           <a:xfrm>
-            <a:off x="4572000" y="1344168"/>
-            <a:ext cx="4427220" cy="4758458"/>
+            <a:off x="342900" y="1043609"/>
+            <a:ext cx="8661952" cy="5082555"/>
           </a:xfrm>
-          <a:prstGeom prst="rect">
-            <a:avLst/>
-          </a:prstGeom>
-          <a:noFill/>
-          <a:ln>
-            <a:solidFill>
-              <a:schemeClr val="tx1"/>
-            </a:solidFill>
-          </a:ln>
         </p:spPr>
         <p:txBody>
-          <a:bodyPr wrap="none" lIns="0" tIns="0" rIns="0" bIns="0">
+          <a:bodyPr>
             <a:normAutofit/>
           </a:bodyPr>
           <a:lstStyle/>
           <a:p>
-            <a:pPr lvl="1"/>
-            <a:endParaRPr lang="en-US" sz="2200" dirty="0">
-              <a:solidFill>
-                <a:srgbClr val="4338CA"/>
-              </a:solidFill>
-            </a:endParaRPr>
-          </a:p>
-          <a:p>
-            <a:pPr lvl="1"/>
-            <a:r>
-              <a:rPr lang="en-US" sz="2200" dirty="0">
-                <a:solidFill>
-                  <a:srgbClr val="4338CA"/>
-                </a:solidFill>
-              </a:rPr>
-              <a:t>MACHINE  </a:t>
-            </a:r>
-            <a:r>
-              <a:rPr lang="en-US" sz="2200" dirty="0" err="1"/>
-              <a:t>MachineName</a:t>
-            </a:r>
-            <a:endParaRPr lang="en-US" sz="2200" dirty="0"/>
-          </a:p>
-          <a:p>
-            <a:pPr lvl="1"/>
-            <a:r>
-              <a:rPr lang="en-US" sz="2200" dirty="0">
-                <a:solidFill>
-                  <a:srgbClr val="4338CA"/>
-                </a:solidFill>
-              </a:rPr>
-              <a:t>SEES</a:t>
-            </a:r>
-          </a:p>
-          <a:p>
-            <a:pPr lvl="1"/>
-            <a:r>
-              <a:rPr lang="en-US" sz="2200" dirty="0">
-                <a:solidFill>
-                  <a:srgbClr val="4338CA"/>
-                </a:solidFill>
-              </a:rPr>
-              <a:t>    </a:t>
-            </a:r>
-            <a:r>
-              <a:rPr lang="en-US" sz="2200" dirty="0" err="1"/>
-              <a:t>ContextName</a:t>
-            </a:r>
-            <a:endParaRPr lang="en-US" sz="2200" dirty="0"/>
-          </a:p>
-          <a:p>
-            <a:pPr lvl="1"/>
-            <a:endParaRPr lang="en-US" sz="2200" dirty="0"/>
-          </a:p>
-          <a:p>
-            <a:pPr lvl="1"/>
-            <a:r>
-              <a:rPr lang="en-US" sz="2200" dirty="0">
-                <a:solidFill>
-                  <a:srgbClr val="4338CA"/>
-                </a:solidFill>
-              </a:rPr>
-              <a:t>VARIABLES</a:t>
-            </a:r>
-          </a:p>
-          <a:p>
-            <a:pPr lvl="1"/>
-            <a:r>
-              <a:rPr lang="en-US" sz="2200" dirty="0">
-                <a:solidFill>
-                  <a:srgbClr val="4338CA"/>
-                </a:solidFill>
-              </a:rPr>
-              <a:t>    </a:t>
-            </a:r>
-            <a:r>
-              <a:rPr lang="en-US" sz="2200" dirty="0" err="1"/>
-              <a:t>state_variables</a:t>
-            </a:r>
-            <a:endParaRPr lang="en-US" sz="2200" dirty="0"/>
-          </a:p>
-          <a:p>
-            <a:pPr lvl="1"/>
-            <a:r>
-              <a:rPr lang="en-US" sz="2200" dirty="0">
-                <a:solidFill>
-                  <a:srgbClr val="4338CA"/>
-                </a:solidFill>
-              </a:rPr>
-              <a:t>INVARIANTS</a:t>
-            </a:r>
-          </a:p>
-          <a:p>
-            <a:pPr lvl="1"/>
-            <a:r>
-              <a:rPr lang="en-US" sz="2200" dirty="0">
-                <a:solidFill>
-                  <a:srgbClr val="4338CA"/>
-                </a:solidFill>
-              </a:rPr>
-              <a:t>    </a:t>
-            </a:r>
-            <a:r>
-              <a:rPr lang="en-US" sz="2200" dirty="0" err="1"/>
-              <a:t>properties_that_always_hold</a:t>
-            </a:r>
-            <a:endParaRPr lang="en-US" sz="2200" dirty="0"/>
-          </a:p>
-          <a:p>
-            <a:pPr lvl="1"/>
-            <a:r>
-              <a:rPr lang="en-US" sz="2200" dirty="0">
-                <a:solidFill>
-                  <a:srgbClr val="4338CA"/>
-                </a:solidFill>
-              </a:rPr>
-              <a:t>INITIALISATION</a:t>
-            </a:r>
-          </a:p>
-          <a:p>
-            <a:pPr lvl="1"/>
-            <a:r>
-              <a:rPr lang="en-US" sz="2200" dirty="0">
-                <a:solidFill>
-                  <a:srgbClr val="4338CA"/>
-                </a:solidFill>
-              </a:rPr>
-              <a:t>    </a:t>
-            </a:r>
-            <a:r>
-              <a:rPr lang="en-US" sz="2200" dirty="0" err="1"/>
-              <a:t>initial_state_definition</a:t>
-            </a:r>
-            <a:endParaRPr lang="en-US" sz="2200" dirty="0"/>
-          </a:p>
-          <a:p>
-            <a:pPr lvl="1"/>
-            <a:r>
-              <a:rPr lang="en-US" sz="2200" dirty="0">
-                <a:solidFill>
-                  <a:srgbClr val="4338CA"/>
-                </a:solidFill>
-              </a:rPr>
-              <a:t>EVENTS</a:t>
-            </a:r>
-          </a:p>
-          <a:p>
-            <a:pPr lvl="1"/>
-            <a:r>
-              <a:rPr lang="en-US" sz="2200" dirty="0">
-                <a:solidFill>
-                  <a:srgbClr val="4338CA"/>
-                </a:solidFill>
-              </a:rPr>
-              <a:t>    </a:t>
-            </a:r>
-            <a:r>
-              <a:rPr lang="en-US" sz="2200" dirty="0" err="1"/>
-              <a:t>operation_definitions</a:t>
-            </a:r>
-            <a:endParaRPr lang="en-US" sz="2200" dirty="0"/>
-          </a:p>
-          <a:p>
-            <a:pPr lvl="1"/>
-            <a:r>
-              <a:rPr lang="en-US" sz="2200" dirty="0">
-                <a:solidFill>
-                  <a:srgbClr val="4338CA"/>
-                </a:solidFill>
-              </a:rPr>
-              <a:t>END</a:t>
-            </a:r>
-          </a:p>
-        </p:txBody>
-      </p:sp>
-      <p:sp>
-        <p:nvSpPr>
-          <p:cNvPr id="3" name="TextBox 2">
-            <a:extLst>
-              <a:ext uri="{FF2B5EF4-FFF2-40B4-BE49-F238E27FC236}">
-                <a16:creationId xmlns:a16="http://schemas.microsoft.com/office/drawing/2014/main" id="{F9151D66-14A8-240E-0761-D3C71E87EAC4}"/>
-              </a:ext>
-            </a:extLst>
-          </p:cNvPr>
-          <p:cNvSpPr txBox="1"/>
-          <p:nvPr/>
-        </p:nvSpPr>
-        <p:spPr>
-          <a:xfrm>
-            <a:off x="144780" y="1344168"/>
-            <a:ext cx="4176920" cy="3178136"/>
-          </a:xfrm>
-          <a:prstGeom prst="rect">
-            <a:avLst/>
-          </a:prstGeom>
-          <a:noFill/>
-          <a:ln>
-            <a:solidFill>
-              <a:schemeClr val="tx1"/>
-            </a:solidFill>
-          </a:ln>
-        </p:spPr>
-        <p:txBody>
-          <a:bodyPr wrap="none" lIns="0" tIns="0" rIns="0" bIns="0">
-            <a:normAutofit/>
-          </a:bodyPr>
-          <a:lstStyle/>
-          <a:p>
-            <a:pPr lvl="1"/>
-            <a:endParaRPr lang="en-US" sz="2200" dirty="0">
-              <a:solidFill>
-                <a:srgbClr val="4338CA"/>
-              </a:solidFill>
-            </a:endParaRPr>
-          </a:p>
-          <a:p>
-            <a:pPr lvl="1"/>
-            <a:r>
-              <a:rPr lang="en-US" sz="2200" dirty="0">
-                <a:solidFill>
-                  <a:srgbClr val="4338CA"/>
-                </a:solidFill>
-              </a:rPr>
-              <a:t>CONTEXT  </a:t>
-            </a:r>
-            <a:r>
-              <a:rPr lang="en-US" sz="2200" dirty="0" err="1"/>
-              <a:t>ContextName</a:t>
-            </a:r>
-            <a:endParaRPr lang="en-US" sz="2200" dirty="0"/>
-          </a:p>
-          <a:p>
-            <a:pPr lvl="1"/>
-            <a:r>
-              <a:rPr lang="en-US" sz="2200" dirty="0">
-                <a:solidFill>
-                  <a:srgbClr val="4338CA"/>
-                </a:solidFill>
-              </a:rPr>
-              <a:t>SETS</a:t>
-            </a:r>
-          </a:p>
-          <a:p>
-            <a:pPr lvl="1"/>
-            <a:r>
-              <a:rPr lang="en-US" sz="2200" dirty="0">
-                <a:solidFill>
-                  <a:srgbClr val="4338CA"/>
-                </a:solidFill>
-              </a:rPr>
-              <a:t>    </a:t>
-            </a:r>
-            <a:r>
-              <a:rPr lang="en-US" sz="2200" dirty="0" err="1"/>
-              <a:t>BasicTypes</a:t>
-            </a:r>
-            <a:endParaRPr lang="en-US" sz="2200" dirty="0"/>
-          </a:p>
-          <a:p>
-            <a:pPr lvl="1"/>
-            <a:r>
-              <a:rPr lang="en-US" sz="2200" dirty="0">
-                <a:solidFill>
-                  <a:srgbClr val="4338CA"/>
-                </a:solidFill>
-              </a:rPr>
-              <a:t>CONSTANTS</a:t>
-            </a:r>
-          </a:p>
-          <a:p>
-            <a:pPr lvl="1"/>
-            <a:r>
-              <a:rPr lang="en-US" sz="2200" dirty="0">
-                <a:solidFill>
-                  <a:srgbClr val="4338CA"/>
-                </a:solidFill>
-              </a:rPr>
-              <a:t>    </a:t>
-            </a:r>
-            <a:r>
-              <a:rPr lang="en-US" sz="2200" dirty="0"/>
-              <a:t>constants</a:t>
-            </a:r>
-          </a:p>
-          <a:p>
-            <a:pPr lvl="1"/>
-            <a:r>
-              <a:rPr lang="en-US" sz="2200" dirty="0">
-                <a:solidFill>
-                  <a:srgbClr val="4338CA"/>
-                </a:solidFill>
-              </a:rPr>
-              <a:t>AXIOMS</a:t>
-            </a:r>
-          </a:p>
-          <a:p>
-            <a:pPr lvl="1"/>
-            <a:r>
-              <a:rPr lang="en-US" sz="2200" dirty="0">
-                <a:solidFill>
-                  <a:srgbClr val="4338CA"/>
-                </a:solidFill>
-              </a:rPr>
-              <a:t>    </a:t>
-            </a:r>
-            <a:r>
-              <a:rPr lang="en-US" sz="2200" dirty="0" err="1"/>
-              <a:t>properties_that_always_hold</a:t>
-            </a:r>
-            <a:endParaRPr lang="en-US" sz="2200" dirty="0"/>
-          </a:p>
-          <a:p>
-            <a:pPr lvl="1"/>
-            <a:r>
-              <a:rPr lang="en-US" sz="2200" dirty="0">
-                <a:solidFill>
-                  <a:srgbClr val="4338CA"/>
-                </a:solidFill>
-              </a:rPr>
-              <a:t>END</a:t>
-            </a:r>
+            <a:endParaRPr lang="en-US" b="1" dirty="0"/>
+          </a:p>
+          <a:p>
+            <a:r>
+              <a:rPr lang="en-US" b="1" dirty="0"/>
+              <a:t>SR-1</a:t>
+            </a:r>
+            <a:r>
+              <a:rPr lang="en-US" dirty="0"/>
+              <a:t>: Doors shall open </a:t>
+            </a:r>
+            <a:r>
+              <a:rPr lang="en-US" i="1" dirty="0"/>
+              <a:t>only</a:t>
+            </a:r>
+            <a:r>
+              <a:rPr lang="en-US" dirty="0"/>
+              <a:t> when a train is stopped at the platform.</a:t>
+            </a:r>
+          </a:p>
+          <a:p>
+            <a:r>
+              <a:rPr lang="en-US" b="1" dirty="0"/>
+              <a:t>SR-2</a:t>
+            </a:r>
+            <a:r>
+              <a:rPr lang="en-US" dirty="0"/>
+              <a:t>: Doors shall remain </a:t>
+            </a:r>
+            <a:r>
+              <a:rPr lang="en-US" i="1" dirty="0"/>
+              <a:t>closed</a:t>
+            </a:r>
+            <a:r>
+              <a:rPr lang="en-US" dirty="0"/>
+              <a:t> whenever no train is present.</a:t>
+            </a:r>
+          </a:p>
+          <a:p>
+            <a:r>
+              <a:rPr lang="en-US" b="1" dirty="0"/>
+              <a:t>SR-3</a:t>
+            </a:r>
+            <a:r>
+              <a:rPr lang="en-US" dirty="0"/>
+              <a:t>: Doors shall close before train departure.</a:t>
+            </a:r>
+          </a:p>
+          <a:p>
+            <a:r>
+              <a:rPr lang="en-US" b="1" dirty="0"/>
+              <a:t>SR-4</a:t>
+            </a:r>
+            <a:r>
+              <a:rPr lang="en-US" dirty="0"/>
+              <a:t>: In emergency mode, doors can be manually overridden.</a:t>
+            </a:r>
+          </a:p>
+          <a:p>
+            <a:r>
+              <a:rPr lang="en-US" b="1" dirty="0"/>
+              <a:t>SR-5</a:t>
+            </a:r>
+            <a:r>
+              <a:rPr lang="en-US" dirty="0"/>
+              <a:t>: No unsafe or undefined state (e.g., open doors + moving train).</a:t>
+            </a:r>
+          </a:p>
+          <a:p>
+            <a:pPr marL="0" indent="0">
+              <a:buNone/>
+            </a:pPr>
+            <a:endParaRPr lang="en-US" dirty="0"/>
+          </a:p>
+          <a:p>
+            <a:pPr marL="0" indent="0" algn="ctr">
+              <a:buNone/>
+            </a:pPr>
+            <a:r>
+              <a:rPr lang="en-US" b="1" dirty="0">
+                <a:solidFill>
+                  <a:schemeClr val="tx2"/>
+                </a:solidFill>
+              </a:rPr>
+              <a:t>These become your </a:t>
+            </a:r>
+            <a:r>
+              <a:rPr lang="en-US" b="1" i="1" dirty="0">
+                <a:solidFill>
+                  <a:schemeClr val="tx2"/>
+                </a:solidFill>
+              </a:rPr>
+              <a:t>safety invariants</a:t>
+            </a:r>
+            <a:r>
+              <a:rPr lang="en-US" b="1" dirty="0">
+                <a:solidFill>
+                  <a:schemeClr val="tx2"/>
+                </a:solidFill>
+              </a:rPr>
+              <a:t> in Event-B.</a:t>
+            </a:r>
+          </a:p>
+          <a:p>
+            <a:endParaRPr lang="en-001" dirty="0"/>
           </a:p>
         </p:txBody>
       </p:sp>
     </p:spTree>
     <p:extLst>
       <p:ext uri="{BB962C8B-B14F-4D97-AF65-F5344CB8AC3E}">
-        <p14:creationId xmlns:p14="http://schemas.microsoft.com/office/powerpoint/2010/main" val="76464128"/>
+        <p14:creationId xmlns:p14="http://schemas.microsoft.com/office/powerpoint/2010/main" val="3600013103"/>
       </p:ext>
     </p:extLst>
   </p:cSld>
@@ -6569,6 +6493,437 @@
           <p:cNvPr id="2" name="Title 1">
             <a:extLst>
               <a:ext uri="{FF2B5EF4-FFF2-40B4-BE49-F238E27FC236}">
+                <a16:creationId xmlns:a16="http://schemas.microsoft.com/office/drawing/2014/main" id="{31CD6A4D-CA98-06F7-5ABB-0B760BE843CE}"/>
+              </a:ext>
+            </a:extLst>
+          </p:cNvPr>
+          <p:cNvSpPr>
+            <a:spLocks noGrp="1"/>
+          </p:cNvSpPr>
+          <p:nvPr>
+            <p:ph type="title"/>
+          </p:nvPr>
+        </p:nvSpPr>
+        <p:spPr>
+          <a:xfrm>
+            <a:off x="285750" y="0"/>
+            <a:ext cx="8572500" cy="1143000"/>
+          </a:xfrm>
+        </p:spPr>
+        <p:txBody>
+          <a:bodyPr>
+            <a:normAutofit/>
+          </a:bodyPr>
+          <a:lstStyle/>
+          <a:p>
+            <a:r>
+              <a:rPr lang="en-US" b="1" dirty="0">
+                <a:solidFill>
+                  <a:schemeClr val="tx2"/>
+                </a:solidFill>
+              </a:rPr>
+              <a:t>Event-B Notation Basics</a:t>
+            </a:r>
+            <a:endParaRPr lang="en-001" b="1" dirty="0">
+              <a:solidFill>
+                <a:schemeClr val="tx2"/>
+              </a:solidFill>
+            </a:endParaRPr>
+          </a:p>
+        </p:txBody>
+      </p:sp>
+      <p:sp>
+        <p:nvSpPr>
+          <p:cNvPr id="6" name="TextBox 5">
+            <a:extLst>
+              <a:ext uri="{FF2B5EF4-FFF2-40B4-BE49-F238E27FC236}">
+                <a16:creationId xmlns:a16="http://schemas.microsoft.com/office/drawing/2014/main" id="{F9F2929C-77CE-A57A-5F28-41D2A207ACDD}"/>
+              </a:ext>
+            </a:extLst>
+          </p:cNvPr>
+          <p:cNvSpPr txBox="1"/>
+          <p:nvPr/>
+        </p:nvSpPr>
+        <p:spPr>
+          <a:xfrm>
+            <a:off x="4572000" y="1344168"/>
+            <a:ext cx="4427220" cy="4758458"/>
+          </a:xfrm>
+          <a:prstGeom prst="rect">
+            <a:avLst/>
+          </a:prstGeom>
+          <a:noFill/>
+          <a:ln>
+            <a:solidFill>
+              <a:schemeClr val="tx1"/>
+            </a:solidFill>
+          </a:ln>
+        </p:spPr>
+        <p:txBody>
+          <a:bodyPr wrap="none" lIns="0" tIns="0" rIns="0" bIns="0">
+            <a:normAutofit/>
+          </a:bodyPr>
+          <a:lstStyle/>
+          <a:p>
+            <a:pPr lvl="1"/>
+            <a:endParaRPr lang="en-US" sz="2200" dirty="0">
+              <a:solidFill>
+                <a:srgbClr val="4338CA"/>
+              </a:solidFill>
+            </a:endParaRPr>
+          </a:p>
+          <a:p>
+            <a:pPr lvl="1"/>
+            <a:r>
+              <a:rPr lang="en-US" sz="2200" dirty="0">
+                <a:solidFill>
+                  <a:srgbClr val="4338CA"/>
+                </a:solidFill>
+              </a:rPr>
+              <a:t>MACHINE  </a:t>
+            </a:r>
+            <a:r>
+              <a:rPr lang="en-US" sz="2200" dirty="0" err="1"/>
+              <a:t>MachineName</a:t>
+            </a:r>
+            <a:endParaRPr lang="en-US" sz="2200" dirty="0"/>
+          </a:p>
+          <a:p>
+            <a:pPr lvl="1"/>
+            <a:r>
+              <a:rPr lang="en-US" sz="2200" dirty="0">
+                <a:solidFill>
+                  <a:srgbClr val="4338CA"/>
+                </a:solidFill>
+              </a:rPr>
+              <a:t>SEES</a:t>
+            </a:r>
+          </a:p>
+          <a:p>
+            <a:pPr lvl="1"/>
+            <a:r>
+              <a:rPr lang="en-US" sz="2200" dirty="0">
+                <a:solidFill>
+                  <a:srgbClr val="4338CA"/>
+                </a:solidFill>
+              </a:rPr>
+              <a:t>    </a:t>
+            </a:r>
+            <a:r>
+              <a:rPr lang="en-US" sz="2200" dirty="0" err="1"/>
+              <a:t>ContextName</a:t>
+            </a:r>
+            <a:endParaRPr lang="en-US" sz="2200" dirty="0"/>
+          </a:p>
+          <a:p>
+            <a:pPr lvl="1"/>
+            <a:endParaRPr lang="en-US" sz="2200" dirty="0"/>
+          </a:p>
+          <a:p>
+            <a:pPr lvl="1"/>
+            <a:r>
+              <a:rPr lang="en-US" sz="2200" dirty="0">
+                <a:solidFill>
+                  <a:srgbClr val="4338CA"/>
+                </a:solidFill>
+              </a:rPr>
+              <a:t>VARIABLES</a:t>
+            </a:r>
+          </a:p>
+          <a:p>
+            <a:pPr lvl="1"/>
+            <a:r>
+              <a:rPr lang="en-US" sz="2200" dirty="0">
+                <a:solidFill>
+                  <a:srgbClr val="4338CA"/>
+                </a:solidFill>
+              </a:rPr>
+              <a:t>    </a:t>
+            </a:r>
+            <a:r>
+              <a:rPr lang="en-US" sz="2200" dirty="0" err="1"/>
+              <a:t>state_variables</a:t>
+            </a:r>
+            <a:endParaRPr lang="en-US" sz="2200" dirty="0"/>
+          </a:p>
+          <a:p>
+            <a:pPr lvl="1"/>
+            <a:r>
+              <a:rPr lang="en-US" sz="2200" dirty="0">
+                <a:solidFill>
+                  <a:srgbClr val="4338CA"/>
+                </a:solidFill>
+              </a:rPr>
+              <a:t>INVARIANTS</a:t>
+            </a:r>
+          </a:p>
+          <a:p>
+            <a:pPr lvl="1"/>
+            <a:r>
+              <a:rPr lang="en-US" sz="2200" dirty="0">
+                <a:solidFill>
+                  <a:srgbClr val="4338CA"/>
+                </a:solidFill>
+              </a:rPr>
+              <a:t>    </a:t>
+            </a:r>
+            <a:r>
+              <a:rPr lang="en-US" sz="2200" dirty="0" err="1"/>
+              <a:t>properties_that_always_hold</a:t>
+            </a:r>
+            <a:endParaRPr lang="en-US" sz="2200" dirty="0"/>
+          </a:p>
+          <a:p>
+            <a:pPr lvl="1"/>
+            <a:r>
+              <a:rPr lang="en-US" sz="2200" dirty="0">
+                <a:solidFill>
+                  <a:srgbClr val="4338CA"/>
+                </a:solidFill>
+              </a:rPr>
+              <a:t>INITIALISATION</a:t>
+            </a:r>
+          </a:p>
+          <a:p>
+            <a:pPr lvl="1"/>
+            <a:r>
+              <a:rPr lang="en-US" sz="2200" dirty="0">
+                <a:solidFill>
+                  <a:srgbClr val="4338CA"/>
+                </a:solidFill>
+              </a:rPr>
+              <a:t>    </a:t>
+            </a:r>
+            <a:r>
+              <a:rPr lang="en-US" sz="2200" dirty="0" err="1"/>
+              <a:t>initial_state_definition</a:t>
+            </a:r>
+            <a:endParaRPr lang="en-US" sz="2200" dirty="0"/>
+          </a:p>
+          <a:p>
+            <a:pPr lvl="1"/>
+            <a:r>
+              <a:rPr lang="en-US" sz="2200" dirty="0">
+                <a:solidFill>
+                  <a:srgbClr val="4338CA"/>
+                </a:solidFill>
+              </a:rPr>
+              <a:t>EVENTS</a:t>
+            </a:r>
+          </a:p>
+          <a:p>
+            <a:pPr lvl="1"/>
+            <a:r>
+              <a:rPr lang="en-US" sz="2200" dirty="0">
+                <a:solidFill>
+                  <a:srgbClr val="4338CA"/>
+                </a:solidFill>
+              </a:rPr>
+              <a:t>    </a:t>
+            </a:r>
+            <a:r>
+              <a:rPr lang="en-US" sz="2200" dirty="0" err="1"/>
+              <a:t>operation_definitions</a:t>
+            </a:r>
+            <a:endParaRPr lang="en-US" sz="2200" dirty="0"/>
+          </a:p>
+          <a:p>
+            <a:pPr lvl="1"/>
+            <a:r>
+              <a:rPr lang="en-US" sz="2200" dirty="0">
+                <a:solidFill>
+                  <a:srgbClr val="4338CA"/>
+                </a:solidFill>
+              </a:rPr>
+              <a:t>END</a:t>
+            </a:r>
+          </a:p>
+        </p:txBody>
+      </p:sp>
+      <p:sp>
+        <p:nvSpPr>
+          <p:cNvPr id="3" name="TextBox 2">
+            <a:extLst>
+              <a:ext uri="{FF2B5EF4-FFF2-40B4-BE49-F238E27FC236}">
+                <a16:creationId xmlns:a16="http://schemas.microsoft.com/office/drawing/2014/main" id="{F9151D66-14A8-240E-0761-D3C71E87EAC4}"/>
+              </a:ext>
+            </a:extLst>
+          </p:cNvPr>
+          <p:cNvSpPr txBox="1"/>
+          <p:nvPr/>
+        </p:nvSpPr>
+        <p:spPr>
+          <a:xfrm>
+            <a:off x="144780" y="1344168"/>
+            <a:ext cx="4176920" cy="3178136"/>
+          </a:xfrm>
+          <a:prstGeom prst="rect">
+            <a:avLst/>
+          </a:prstGeom>
+          <a:noFill/>
+          <a:ln>
+            <a:solidFill>
+              <a:schemeClr val="tx1"/>
+            </a:solidFill>
+          </a:ln>
+        </p:spPr>
+        <p:txBody>
+          <a:bodyPr wrap="none" lIns="0" tIns="0" rIns="0" bIns="0">
+            <a:normAutofit/>
+          </a:bodyPr>
+          <a:lstStyle/>
+          <a:p>
+            <a:pPr lvl="1"/>
+            <a:endParaRPr lang="en-US" sz="2200" dirty="0">
+              <a:solidFill>
+                <a:srgbClr val="4338CA"/>
+              </a:solidFill>
+            </a:endParaRPr>
+          </a:p>
+          <a:p>
+            <a:pPr lvl="1"/>
+            <a:r>
+              <a:rPr lang="en-US" sz="2200" dirty="0">
+                <a:solidFill>
+                  <a:srgbClr val="4338CA"/>
+                </a:solidFill>
+              </a:rPr>
+              <a:t>CONTEXT  </a:t>
+            </a:r>
+            <a:r>
+              <a:rPr lang="en-US" sz="2200" dirty="0" err="1"/>
+              <a:t>ContextName</a:t>
+            </a:r>
+            <a:endParaRPr lang="en-US" sz="2200" dirty="0"/>
+          </a:p>
+          <a:p>
+            <a:pPr lvl="1"/>
+            <a:r>
+              <a:rPr lang="en-US" sz="2200" dirty="0">
+                <a:solidFill>
+                  <a:srgbClr val="4338CA"/>
+                </a:solidFill>
+              </a:rPr>
+              <a:t>SETS</a:t>
+            </a:r>
+          </a:p>
+          <a:p>
+            <a:pPr lvl="1"/>
+            <a:r>
+              <a:rPr lang="en-US" sz="2200" dirty="0">
+                <a:solidFill>
+                  <a:srgbClr val="4338CA"/>
+                </a:solidFill>
+              </a:rPr>
+              <a:t>    </a:t>
+            </a:r>
+            <a:r>
+              <a:rPr lang="en-US" sz="2200" dirty="0" err="1"/>
+              <a:t>BasicTypes</a:t>
+            </a:r>
+            <a:endParaRPr lang="en-US" sz="2200" dirty="0"/>
+          </a:p>
+          <a:p>
+            <a:pPr lvl="1"/>
+            <a:r>
+              <a:rPr lang="en-US" sz="2200" dirty="0">
+                <a:solidFill>
+                  <a:srgbClr val="4338CA"/>
+                </a:solidFill>
+              </a:rPr>
+              <a:t>CONSTANTS</a:t>
+            </a:r>
+          </a:p>
+          <a:p>
+            <a:pPr lvl="1"/>
+            <a:r>
+              <a:rPr lang="en-US" sz="2200" dirty="0">
+                <a:solidFill>
+                  <a:srgbClr val="4338CA"/>
+                </a:solidFill>
+              </a:rPr>
+              <a:t>    </a:t>
+            </a:r>
+            <a:r>
+              <a:rPr lang="en-US" sz="2200" dirty="0"/>
+              <a:t>constants</a:t>
+            </a:r>
+          </a:p>
+          <a:p>
+            <a:pPr lvl="1"/>
+            <a:r>
+              <a:rPr lang="en-US" sz="2200" dirty="0">
+                <a:solidFill>
+                  <a:srgbClr val="4338CA"/>
+                </a:solidFill>
+              </a:rPr>
+              <a:t>AXIOMS</a:t>
+            </a:r>
+          </a:p>
+          <a:p>
+            <a:pPr lvl="1"/>
+            <a:r>
+              <a:rPr lang="en-US" sz="2200" dirty="0">
+                <a:solidFill>
+                  <a:srgbClr val="4338CA"/>
+                </a:solidFill>
+              </a:rPr>
+              <a:t>    </a:t>
+            </a:r>
+            <a:r>
+              <a:rPr lang="en-US" sz="2200" dirty="0" err="1"/>
+              <a:t>properties_that_always_hold</a:t>
+            </a:r>
+            <a:endParaRPr lang="en-US" sz="2200" dirty="0"/>
+          </a:p>
+          <a:p>
+            <a:pPr lvl="1"/>
+            <a:r>
+              <a:rPr lang="en-US" sz="2200" dirty="0">
+                <a:solidFill>
+                  <a:srgbClr val="4338CA"/>
+                </a:solidFill>
+              </a:rPr>
+              <a:t>END</a:t>
+            </a:r>
+          </a:p>
+        </p:txBody>
+      </p:sp>
+    </p:spTree>
+    <p:extLst>
+      <p:ext uri="{BB962C8B-B14F-4D97-AF65-F5344CB8AC3E}">
+        <p14:creationId xmlns:p14="http://schemas.microsoft.com/office/powerpoint/2010/main" val="76464128"/>
+      </p:ext>
+    </p:extLst>
+  </p:cSld>
+  <p:clrMapOvr>
+    <a:masterClrMapping/>
+  </p:clrMapOvr>
+</p:sld>
+</file>
+
+<file path=ppt/slides/slide18.xml><?xml version="1.0" encoding="utf-8"?>
+<p:sld xmlns:a="http://schemas.openxmlformats.org/drawingml/2006/main" xmlns:r="http://schemas.openxmlformats.org/officeDocument/2006/relationships" xmlns:p="http://schemas.openxmlformats.org/presentationml/2006/main">
+  <p:cSld>
+    <p:spTree>
+      <p:nvGrpSpPr>
+        <p:cNvPr id="1" name=""/>
+        <p:cNvGrpSpPr/>
+        <p:nvPr/>
+      </p:nvGrpSpPr>
+      <p:grpSpPr>
+        <a:xfrm>
+          <a:off x="0" y="0"/>
+          <a:ext cx="0" cy="0"/>
+          <a:chOff x="0" y="0"/>
+          <a:chExt cx="0" cy="0"/>
+        </a:xfrm>
+      </p:grpSpPr>
+      <p:sp>
+        <p:nvSpPr>
+          <p:cNvPr id="2" name="Title 1">
+            <a:extLst>
+              <a:ext uri="{FF2B5EF4-FFF2-40B4-BE49-F238E27FC236}">
                 <a16:creationId xmlns:a16="http://schemas.microsoft.com/office/drawing/2014/main" id="{AFB8736E-E299-7596-385B-A4EA740D1C3D}"/>
               </a:ext>
             </a:extLst>
@@ -6828,7 +7183,7 @@
 </p:sld>
 </file>
 
-<file path=ppt/slides/slide18.xml><?xml version="1.0" encoding="utf-8"?>
+<file path=ppt/slides/slide19.xml><?xml version="1.0" encoding="utf-8"?>
 <p:sld xmlns:a="http://schemas.openxmlformats.org/drawingml/2006/main" xmlns:r="http://schemas.openxmlformats.org/officeDocument/2006/relationships" xmlns:p="http://schemas.openxmlformats.org/presentationml/2006/main">
   <p:cSld>
     <p:spTree>
@@ -7371,287 +7726,6 @@
         <p14:creationId xmlns:p14="http://schemas.microsoft.com/office/powerpoint/2010/main" val="3699957221"/>
       </p:ext>
     </p:extLst>
-  </p:cSld>
-  <p:clrMapOvr>
-    <a:masterClrMapping/>
-  </p:clrMapOvr>
-</p:sld>
-</file>
-
-<file path=ppt/slides/slide19.xml><?xml version="1.0" encoding="utf-8"?>
-<p:sld xmlns:a="http://schemas.openxmlformats.org/drawingml/2006/main" xmlns:r="http://schemas.openxmlformats.org/officeDocument/2006/relationships" xmlns:p="http://schemas.openxmlformats.org/presentationml/2006/main">
-  <p:cSld>
-    <p:spTree>
-      <p:nvGrpSpPr>
-        <p:cNvPr id="1" name=""/>
-        <p:cNvGrpSpPr/>
-        <p:nvPr/>
-      </p:nvGrpSpPr>
-      <p:grpSpPr>
-        <a:xfrm>
-          <a:off x="0" y="0"/>
-          <a:ext cx="0" cy="0"/>
-          <a:chOff x="0" y="0"/>
-          <a:chExt cx="0" cy="0"/>
-        </a:xfrm>
-      </p:grpSpPr>
-      <p:sp>
-        <p:nvSpPr>
-          <p:cNvPr id="2" name="Title 1"/>
-          <p:cNvSpPr>
-            <a:spLocks noGrp="1"/>
-          </p:cNvSpPr>
-          <p:nvPr>
-            <p:ph type="title"/>
-          </p:nvPr>
-        </p:nvSpPr>
-        <p:spPr>
-          <a:xfrm>
-            <a:off x="328612" y="0"/>
-            <a:ext cx="8486775" cy="1143000"/>
-          </a:xfrm>
-        </p:spPr>
-        <p:txBody>
-          <a:bodyPr/>
-          <a:lstStyle/>
-          <a:p>
-            <a:r>
-              <a:rPr b="1" dirty="0">
-                <a:solidFill>
-                  <a:schemeClr val="tx2"/>
-                </a:solidFill>
-              </a:rPr>
-              <a:t>Event-B </a:t>
-            </a:r>
-            <a:r>
-              <a:rPr lang="en-US" b="1" dirty="0">
-                <a:solidFill>
-                  <a:schemeClr val="tx2"/>
-                </a:solidFill>
-              </a:rPr>
-              <a:t>Structure</a:t>
-            </a:r>
-            <a:endParaRPr b="1" dirty="0">
-              <a:solidFill>
-                <a:schemeClr val="tx2"/>
-              </a:solidFill>
-            </a:endParaRPr>
-          </a:p>
-        </p:txBody>
-      </p:sp>
-      <p:sp>
-        <p:nvSpPr>
-          <p:cNvPr id="3" name="Content Placeholder 2"/>
-          <p:cNvSpPr>
-            <a:spLocks noGrp="1"/>
-          </p:cNvSpPr>
-          <p:nvPr>
-            <p:ph idx="1"/>
-          </p:nvPr>
-        </p:nvSpPr>
-        <p:spPr>
-          <a:xfrm>
-            <a:off x="328612" y="949569"/>
-            <a:ext cx="8586787" cy="5510866"/>
-          </a:xfrm>
-        </p:spPr>
-        <p:txBody>
-          <a:bodyPr>
-            <a:noAutofit/>
-          </a:bodyPr>
-          <a:lstStyle/>
-          <a:p>
-            <a:r>
-              <a:rPr lang="en-US" sz="2000" b="1" dirty="0">
-                <a:solidFill>
-                  <a:schemeClr val="tx2"/>
-                </a:solidFill>
-              </a:rPr>
-              <a:t>Context</a:t>
-            </a:r>
-            <a:r>
-              <a:rPr lang="en-US" sz="2000" dirty="0"/>
-              <a:t> </a:t>
-            </a:r>
-            <a:r>
-              <a:rPr lang="en-US" sz="2000" i="1" dirty="0"/>
-              <a:t>(Static, domain facts)</a:t>
-            </a:r>
-            <a:endParaRPr lang="en-US" sz="2000" dirty="0"/>
-          </a:p>
-          <a:p>
-            <a:pPr lvl="1"/>
-            <a:r>
-              <a:rPr lang="en-US" sz="2000" b="1" dirty="0"/>
-              <a:t>SETS:</a:t>
-            </a:r>
-            <a:r>
-              <a:rPr lang="en-US" sz="2000" dirty="0"/>
-              <a:t> Abstract types </a:t>
-            </a:r>
-          </a:p>
-          <a:p>
-            <a:pPr lvl="1"/>
-            <a:r>
-              <a:rPr lang="en-US" sz="2000" b="1" dirty="0"/>
-              <a:t>CONSTANTS:</a:t>
-            </a:r>
-            <a:r>
-              <a:rPr lang="en-US" sz="2000" dirty="0"/>
-              <a:t> Named domain values </a:t>
-            </a:r>
-          </a:p>
-          <a:p>
-            <a:pPr lvl="1"/>
-            <a:r>
-              <a:rPr lang="en-US" sz="2000" b="1" dirty="0"/>
-              <a:t>AXIOMS:</a:t>
-            </a:r>
-            <a:r>
-              <a:rPr lang="en-US" sz="2000" dirty="0"/>
-              <a:t> Properties over sets/constants (type definitions, constraints)</a:t>
-            </a:r>
-          </a:p>
-          <a:p>
-            <a:r>
-              <a:rPr lang="en-US" sz="2000" b="1" dirty="0">
-                <a:solidFill>
-                  <a:schemeClr val="tx2"/>
-                </a:solidFill>
-              </a:rPr>
-              <a:t>Machine</a:t>
-            </a:r>
-            <a:r>
-              <a:rPr lang="en-US" sz="2000" dirty="0"/>
-              <a:t> </a:t>
-            </a:r>
-            <a:r>
-              <a:rPr lang="en-US" sz="2000" i="1" dirty="0"/>
-              <a:t>(Dynamic, system behavior)</a:t>
-            </a:r>
-            <a:endParaRPr lang="en-US" sz="2000" dirty="0"/>
-          </a:p>
-          <a:p>
-            <a:pPr lvl="1"/>
-            <a:r>
-              <a:rPr lang="en-US" sz="2000" b="1" dirty="0"/>
-              <a:t>SEES:</a:t>
-            </a:r>
-            <a:r>
-              <a:rPr lang="en-US" sz="2000" dirty="0"/>
-              <a:t> Links to one or more Contexts</a:t>
-            </a:r>
-          </a:p>
-          <a:p>
-            <a:pPr lvl="1"/>
-            <a:r>
-              <a:rPr lang="en-US" sz="2000" b="1" dirty="0"/>
-              <a:t>VARIABLES (state):</a:t>
-            </a:r>
-            <a:r>
-              <a:rPr lang="en-US" sz="2000" dirty="0"/>
-              <a:t> System state components</a:t>
-            </a:r>
-          </a:p>
-          <a:p>
-            <a:pPr lvl="1"/>
-            <a:r>
-              <a:rPr lang="en-US" sz="2000" b="1" dirty="0"/>
-              <a:t>INVARIANTS:</a:t>
-            </a:r>
-            <a:r>
-              <a:rPr lang="en-US" sz="2000" dirty="0"/>
-              <a:t> Properties that </a:t>
-            </a:r>
-            <a:r>
-              <a:rPr lang="en-US" sz="2000" b="1" dirty="0"/>
-              <a:t>must always hold</a:t>
-            </a:r>
-            <a:r>
-              <a:rPr lang="en-US" sz="2000" dirty="0"/>
-              <a:t> for the variables, before and after every event</a:t>
-            </a:r>
-          </a:p>
-          <a:p>
-            <a:r>
-              <a:rPr lang="en-US" sz="2000" b="1" dirty="0">
-                <a:solidFill>
-                  <a:schemeClr val="tx2"/>
-                </a:solidFill>
-              </a:rPr>
-              <a:t>INITIALISATION</a:t>
-            </a:r>
-            <a:r>
-              <a:rPr lang="en-US" sz="2000" b="1" dirty="0"/>
-              <a:t>:</a:t>
-            </a:r>
-            <a:r>
-              <a:rPr lang="en-US" sz="2000" dirty="0"/>
-              <a:t> Assigns the initial state satisfying the invariants</a:t>
-            </a:r>
-          </a:p>
-          <a:p>
-            <a:r>
-              <a:rPr lang="en-US" sz="2000" b="1" dirty="0">
-                <a:solidFill>
-                  <a:schemeClr val="tx2"/>
-                </a:solidFill>
-              </a:rPr>
-              <a:t>EVENTS</a:t>
-            </a:r>
-            <a:r>
-              <a:rPr lang="en-US" sz="2000" b="1" dirty="0"/>
-              <a:t>:</a:t>
-            </a:r>
-            <a:r>
-              <a:rPr lang="en-US" sz="2000" dirty="0"/>
-              <a:t> Possible state transitions </a:t>
-            </a:r>
-            <a:r>
-              <a:rPr lang="en-US" sz="2000" i="1" dirty="0"/>
-              <a:t>(How behavior is modelled)</a:t>
-            </a:r>
-            <a:endParaRPr lang="en-US" sz="2000" dirty="0"/>
-          </a:p>
-          <a:p>
-            <a:pPr lvl="1"/>
-            <a:r>
-              <a:rPr lang="en-US" sz="2000" b="1" dirty="0"/>
-              <a:t>Guards:</a:t>
-            </a:r>
-            <a:r>
-              <a:rPr lang="en-US" sz="2000" dirty="0"/>
-              <a:t> Conditions enabling the event (when it is allowed)</a:t>
-            </a:r>
-          </a:p>
-          <a:p>
-            <a:pPr lvl="1"/>
-            <a:r>
-              <a:rPr lang="en-US" sz="2000" b="1" dirty="0"/>
-              <a:t>Actions:</a:t>
-            </a:r>
-            <a:r>
-              <a:rPr lang="en-US" sz="2000" dirty="0"/>
-              <a:t> State updates</a:t>
-            </a:r>
-          </a:p>
-          <a:p>
-            <a:pPr lvl="1"/>
-            <a:r>
-              <a:rPr lang="en-US" sz="2000" b="1" dirty="0"/>
-              <a:t>ANY / WHERE:</a:t>
-            </a:r>
-            <a:r>
-              <a:rPr lang="en-US" sz="2000" dirty="0"/>
-              <a:t> (optional) Binds local parameters with constraints</a:t>
-            </a:r>
-          </a:p>
-          <a:p>
-            <a:endParaRPr sz="2000" dirty="0"/>
-          </a:p>
-        </p:txBody>
-      </p:sp>
-    </p:spTree>
   </p:cSld>
   <p:clrMapOvr>
     <a:masterClrMapping/>
@@ -7806,6 +7880,287 @@
   <p:cSld>
     <p:spTree>
       <p:nvGrpSpPr>
+        <p:cNvPr id="1" name=""/>
+        <p:cNvGrpSpPr/>
+        <p:nvPr/>
+      </p:nvGrpSpPr>
+      <p:grpSpPr>
+        <a:xfrm>
+          <a:off x="0" y="0"/>
+          <a:ext cx="0" cy="0"/>
+          <a:chOff x="0" y="0"/>
+          <a:chExt cx="0" cy="0"/>
+        </a:xfrm>
+      </p:grpSpPr>
+      <p:sp>
+        <p:nvSpPr>
+          <p:cNvPr id="2" name="Title 1"/>
+          <p:cNvSpPr>
+            <a:spLocks noGrp="1"/>
+          </p:cNvSpPr>
+          <p:nvPr>
+            <p:ph type="title"/>
+          </p:nvPr>
+        </p:nvSpPr>
+        <p:spPr>
+          <a:xfrm>
+            <a:off x="328612" y="0"/>
+            <a:ext cx="8486775" cy="1143000"/>
+          </a:xfrm>
+        </p:spPr>
+        <p:txBody>
+          <a:bodyPr/>
+          <a:lstStyle/>
+          <a:p>
+            <a:r>
+              <a:rPr b="1" dirty="0">
+                <a:solidFill>
+                  <a:schemeClr val="tx2"/>
+                </a:solidFill>
+              </a:rPr>
+              <a:t>Event-B </a:t>
+            </a:r>
+            <a:r>
+              <a:rPr lang="en-US" b="1" dirty="0">
+                <a:solidFill>
+                  <a:schemeClr val="tx2"/>
+                </a:solidFill>
+              </a:rPr>
+              <a:t>Structure</a:t>
+            </a:r>
+            <a:endParaRPr b="1" dirty="0">
+              <a:solidFill>
+                <a:schemeClr val="tx2"/>
+              </a:solidFill>
+            </a:endParaRPr>
+          </a:p>
+        </p:txBody>
+      </p:sp>
+      <p:sp>
+        <p:nvSpPr>
+          <p:cNvPr id="3" name="Content Placeholder 2"/>
+          <p:cNvSpPr>
+            <a:spLocks noGrp="1"/>
+          </p:cNvSpPr>
+          <p:nvPr>
+            <p:ph idx="1"/>
+          </p:nvPr>
+        </p:nvSpPr>
+        <p:spPr>
+          <a:xfrm>
+            <a:off x="328612" y="949569"/>
+            <a:ext cx="8586787" cy="5510866"/>
+          </a:xfrm>
+        </p:spPr>
+        <p:txBody>
+          <a:bodyPr>
+            <a:noAutofit/>
+          </a:bodyPr>
+          <a:lstStyle/>
+          <a:p>
+            <a:r>
+              <a:rPr lang="en-US" sz="2000" b="1" dirty="0">
+                <a:solidFill>
+                  <a:schemeClr val="tx2"/>
+                </a:solidFill>
+              </a:rPr>
+              <a:t>Context</a:t>
+            </a:r>
+            <a:r>
+              <a:rPr lang="en-US" sz="2000" dirty="0"/>
+              <a:t> </a:t>
+            </a:r>
+            <a:r>
+              <a:rPr lang="en-US" sz="2000" i="1" dirty="0"/>
+              <a:t>(Static, domain facts)</a:t>
+            </a:r>
+            <a:endParaRPr lang="en-US" sz="2000" dirty="0"/>
+          </a:p>
+          <a:p>
+            <a:pPr lvl="1"/>
+            <a:r>
+              <a:rPr lang="en-US" sz="2000" b="1" dirty="0"/>
+              <a:t>SETS:</a:t>
+            </a:r>
+            <a:r>
+              <a:rPr lang="en-US" sz="2000" dirty="0"/>
+              <a:t> Abstract types </a:t>
+            </a:r>
+          </a:p>
+          <a:p>
+            <a:pPr lvl="1"/>
+            <a:r>
+              <a:rPr lang="en-US" sz="2000" b="1" dirty="0"/>
+              <a:t>CONSTANTS:</a:t>
+            </a:r>
+            <a:r>
+              <a:rPr lang="en-US" sz="2000" dirty="0"/>
+              <a:t> Named domain values </a:t>
+            </a:r>
+          </a:p>
+          <a:p>
+            <a:pPr lvl="1"/>
+            <a:r>
+              <a:rPr lang="en-US" sz="2000" b="1" dirty="0"/>
+              <a:t>AXIOMS:</a:t>
+            </a:r>
+            <a:r>
+              <a:rPr lang="en-US" sz="2000" dirty="0"/>
+              <a:t> Properties over sets/constants (type definitions, constraints)</a:t>
+            </a:r>
+          </a:p>
+          <a:p>
+            <a:r>
+              <a:rPr lang="en-US" sz="2000" b="1" dirty="0">
+                <a:solidFill>
+                  <a:schemeClr val="tx2"/>
+                </a:solidFill>
+              </a:rPr>
+              <a:t>Machine</a:t>
+            </a:r>
+            <a:r>
+              <a:rPr lang="en-US" sz="2000" dirty="0"/>
+              <a:t> </a:t>
+            </a:r>
+            <a:r>
+              <a:rPr lang="en-US" sz="2000" i="1" dirty="0"/>
+              <a:t>(Dynamic, system behavior)</a:t>
+            </a:r>
+            <a:endParaRPr lang="en-US" sz="2000" dirty="0"/>
+          </a:p>
+          <a:p>
+            <a:pPr lvl="1"/>
+            <a:r>
+              <a:rPr lang="en-US" sz="2000" b="1" dirty="0"/>
+              <a:t>SEES:</a:t>
+            </a:r>
+            <a:r>
+              <a:rPr lang="en-US" sz="2000" dirty="0"/>
+              <a:t> Links to one or more Contexts</a:t>
+            </a:r>
+          </a:p>
+          <a:p>
+            <a:pPr lvl="1"/>
+            <a:r>
+              <a:rPr lang="en-US" sz="2000" b="1" dirty="0"/>
+              <a:t>VARIABLES (state):</a:t>
+            </a:r>
+            <a:r>
+              <a:rPr lang="en-US" sz="2000" dirty="0"/>
+              <a:t> System state components</a:t>
+            </a:r>
+          </a:p>
+          <a:p>
+            <a:pPr lvl="1"/>
+            <a:r>
+              <a:rPr lang="en-US" sz="2000" b="1" dirty="0"/>
+              <a:t>INVARIANTS:</a:t>
+            </a:r>
+            <a:r>
+              <a:rPr lang="en-US" sz="2000" dirty="0"/>
+              <a:t> Properties that </a:t>
+            </a:r>
+            <a:r>
+              <a:rPr lang="en-US" sz="2000" b="1" dirty="0"/>
+              <a:t>must always hold</a:t>
+            </a:r>
+            <a:r>
+              <a:rPr lang="en-US" sz="2000" dirty="0"/>
+              <a:t> for the variables, before and after every event</a:t>
+            </a:r>
+          </a:p>
+          <a:p>
+            <a:r>
+              <a:rPr lang="en-US" sz="2000" b="1" dirty="0">
+                <a:solidFill>
+                  <a:schemeClr val="tx2"/>
+                </a:solidFill>
+              </a:rPr>
+              <a:t>INITIALISATION</a:t>
+            </a:r>
+            <a:r>
+              <a:rPr lang="en-US" sz="2000" b="1" dirty="0"/>
+              <a:t>:</a:t>
+            </a:r>
+            <a:r>
+              <a:rPr lang="en-US" sz="2000" dirty="0"/>
+              <a:t> Assigns the initial state satisfying the invariants</a:t>
+            </a:r>
+          </a:p>
+          <a:p>
+            <a:r>
+              <a:rPr lang="en-US" sz="2000" b="1" dirty="0">
+                <a:solidFill>
+                  <a:schemeClr val="tx2"/>
+                </a:solidFill>
+              </a:rPr>
+              <a:t>EVENTS</a:t>
+            </a:r>
+            <a:r>
+              <a:rPr lang="en-US" sz="2000" b="1" dirty="0"/>
+              <a:t>:</a:t>
+            </a:r>
+            <a:r>
+              <a:rPr lang="en-US" sz="2000" dirty="0"/>
+              <a:t> Possible state transitions </a:t>
+            </a:r>
+            <a:r>
+              <a:rPr lang="en-US" sz="2000" i="1" dirty="0"/>
+              <a:t>(How behavior is modelled)</a:t>
+            </a:r>
+            <a:endParaRPr lang="en-US" sz="2000" dirty="0"/>
+          </a:p>
+          <a:p>
+            <a:pPr lvl="1"/>
+            <a:r>
+              <a:rPr lang="en-US" sz="2000" b="1" dirty="0"/>
+              <a:t>Guards:</a:t>
+            </a:r>
+            <a:r>
+              <a:rPr lang="en-US" sz="2000" dirty="0"/>
+              <a:t> Conditions enabling the event (when it is allowed)</a:t>
+            </a:r>
+          </a:p>
+          <a:p>
+            <a:pPr lvl="1"/>
+            <a:r>
+              <a:rPr lang="en-US" sz="2000" b="1" dirty="0"/>
+              <a:t>Actions:</a:t>
+            </a:r>
+            <a:r>
+              <a:rPr lang="en-US" sz="2000" dirty="0"/>
+              <a:t> State updates</a:t>
+            </a:r>
+          </a:p>
+          <a:p>
+            <a:pPr lvl="1"/>
+            <a:r>
+              <a:rPr lang="en-US" sz="2000" b="1" dirty="0"/>
+              <a:t>ANY / WHERE:</a:t>
+            </a:r>
+            <a:r>
+              <a:rPr lang="en-US" sz="2000" dirty="0"/>
+              <a:t> (optional) Binds local parameters with constraints</a:t>
+            </a:r>
+          </a:p>
+          <a:p>
+            <a:endParaRPr sz="2000" dirty="0"/>
+          </a:p>
+        </p:txBody>
+      </p:sp>
+    </p:spTree>
+  </p:cSld>
+  <p:clrMapOvr>
+    <a:masterClrMapping/>
+  </p:clrMapOvr>
+</p:sld>
+</file>
+
+<file path=ppt/slides/slide21.xml><?xml version="1.0" encoding="utf-8"?>
+<p:sld xmlns:a="http://schemas.openxmlformats.org/drawingml/2006/main" xmlns:r="http://schemas.openxmlformats.org/officeDocument/2006/relationships" xmlns:p="http://schemas.openxmlformats.org/presentationml/2006/main">
+  <p:cSld>
+    <p:spTree>
+      <p:nvGrpSpPr>
         <p:cNvPr id="1" name="">
           <a:extLst>
             <a:ext uri="{FF2B5EF4-FFF2-40B4-BE49-F238E27FC236}">
@@ -8893,7 +9248,7 @@
 </p:sld>
 </file>
 
-<file path=ppt/slides/slide21.xml><?xml version="1.0" encoding="utf-8"?>
+<file path=ppt/slides/slide22.xml><?xml version="1.0" encoding="utf-8"?>
 <p:sld xmlns:a="http://schemas.openxmlformats.org/drawingml/2006/main" xmlns:r="http://schemas.openxmlformats.org/officeDocument/2006/relationships" xmlns:p="http://schemas.openxmlformats.org/presentationml/2006/main">
   <p:cSld>
     <p:spTree>
@@ -9615,7 +9970,7 @@
 </p:sld>
 </file>
 
-<file path=ppt/slides/slide22.xml><?xml version="1.0" encoding="utf-8"?>
+<file path=ppt/slides/slide23.xml><?xml version="1.0" encoding="utf-8"?>
 <p:sld xmlns:a="http://schemas.openxmlformats.org/drawingml/2006/main" xmlns:r="http://schemas.openxmlformats.org/officeDocument/2006/relationships" xmlns:p="http://schemas.openxmlformats.org/presentationml/2006/main">
   <p:cSld>
     <p:spTree>
@@ -9947,6 +10302,71 @@
                 </a:solidFill>
               </a:rPr>
               <a:t>FORMAL SPECIFICATION TECHNIQUES</a:t>
+            </a:r>
+          </a:p>
+        </p:txBody>
+      </p:sp>
+      <p:pic>
+        <p:nvPicPr>
+          <p:cNvPr id="3" name="Picture 2" descr="A qr code with a few black squares&#10;&#10;AI-generated content may be incorrect.">
+            <a:extLst>
+              <a:ext uri="{FF2B5EF4-FFF2-40B4-BE49-F238E27FC236}">
+                <a16:creationId xmlns:a16="http://schemas.microsoft.com/office/drawing/2014/main" id="{96DB18B7-87D8-04B2-6251-D6500EB27284}"/>
+              </a:ext>
+            </a:extLst>
+          </p:cNvPr>
+          <p:cNvPicPr>
+            <a:picLocks noChangeAspect="1"/>
+          </p:cNvPicPr>
+          <p:nvPr/>
+        </p:nvPicPr>
+        <p:blipFill>
+          <a:blip r:embed="rId2"/>
+          <a:stretch>
+            <a:fillRect/>
+          </a:stretch>
+        </p:blipFill>
+        <p:spPr>
+          <a:xfrm>
+            <a:off x="3330832" y="3541889"/>
+            <a:ext cx="2261983" cy="2278838"/>
+          </a:xfrm>
+          <a:prstGeom prst="rect">
+            <a:avLst/>
+          </a:prstGeom>
+        </p:spPr>
+      </p:pic>
+      <p:sp>
+        <p:nvSpPr>
+          <p:cNvPr id="6" name="TextBox 5">
+            <a:extLst>
+              <a:ext uri="{FF2B5EF4-FFF2-40B4-BE49-F238E27FC236}">
+                <a16:creationId xmlns:a16="http://schemas.microsoft.com/office/drawing/2014/main" id="{66FC89A7-87B9-D020-8764-D0AE32FB9FCE}"/>
+              </a:ext>
+            </a:extLst>
+          </p:cNvPr>
+          <p:cNvSpPr txBox="1"/>
+          <p:nvPr/>
+        </p:nvSpPr>
+        <p:spPr>
+          <a:xfrm>
+            <a:off x="3900201" y="5820727"/>
+            <a:ext cx="1123244" cy="461665"/>
+          </a:xfrm>
+          <a:prstGeom prst="rect">
+            <a:avLst/>
+          </a:prstGeom>
+          <a:noFill/>
+        </p:spPr>
+        <p:txBody>
+          <a:bodyPr wrap="square">
+            <a:spAutoFit/>
+          </a:bodyPr>
+          <a:lstStyle/>
+          <a:p>
+            <a:r>
+              <a:rPr lang="en-001" sz="2400" dirty="0"/>
+              <a:t>612352</a:t>
             </a:r>
           </a:p>
         </p:txBody>
